--- a/public/fun/cards/life/life-36.pptx
+++ b/public/fun/cards/life/life-36.pptx
@@ -3085,7 +3085,7 @@
     <p:bg>
       <p:bgPr>
         <a:solidFill>
-          <a:srgbClr val="F9F1F4"/>
+          <a:srgbClr val="FFFFFF"/>
         </a:solidFill>
         <a:effectLst/>
       </p:bgPr>
@@ -3099,20 +3099,20 @@
       <p:grpSpPr/>
       <p:sp>
         <p:nvSpPr>
-          <p:cNvPr id="2" name="Rectangle 1"/>
+          <p:cNvPr id="2" name="Oval 1"/>
           <p:cNvSpPr/>
           <p:nvPr/>
         </p:nvSpPr>
         <p:spPr>
           <a:xfrm>
-            <a:off x="0" y="1339200"/>
-            <a:ext cx="3240000" cy="460800"/>
-          </a:xfrm>
-          <a:prstGeom prst="rect">
+            <a:off x="2646000" y="234000"/>
+            <a:ext cx="36000" cy="36000"/>
+          </a:xfrm>
+          <a:prstGeom prst="ellipse">
             <a:avLst/>
           </a:prstGeom>
           <a:solidFill>
-            <a:srgbClr val="B8517C"/>
+            <a:srgbClr val="0057FF"/>
           </a:solidFill>
           <a:ln>
             <a:noFill/>
@@ -3134,14 +3134,14 @@
         </p:nvSpPr>
         <p:spPr>
           <a:xfrm>
-            <a:off x="2828520" y="249840"/>
-            <a:ext cx="102960" cy="174240"/>
+            <a:off x="2646000" y="334800"/>
+            <a:ext cx="36000" cy="36000"/>
           </a:xfrm>
           <a:prstGeom prst="ellipse">
             <a:avLst/>
           </a:prstGeom>
           <a:solidFill>
-            <a:srgbClr val="B8517C"/>
+            <a:srgbClr val="DBE7FF"/>
           </a:solidFill>
           <a:ln>
             <a:noFill/>
@@ -3162,15 +3162,15 @@
           <p:nvPr/>
         </p:nvSpPr>
         <p:spPr>
-          <a:xfrm rot="4320000">
-            <a:off x="2918908" y="315511"/>
-            <a:ext cx="102960" cy="174240"/>
+          <a:xfrm>
+            <a:off x="2646000" y="435600"/>
+            <a:ext cx="36000" cy="36000"/>
           </a:xfrm>
           <a:prstGeom prst="ellipse">
             <a:avLst/>
           </a:prstGeom>
           <a:solidFill>
-            <a:srgbClr val="B8517C"/>
+            <a:srgbClr val="DBE7FF"/>
           </a:solidFill>
           <a:ln>
             <a:noFill/>
@@ -3191,15 +3191,15 @@
           <p:nvPr/>
         </p:nvSpPr>
         <p:spPr>
-          <a:xfrm rot="8640000">
-            <a:off x="2884383" y="421769"/>
-            <a:ext cx="102960" cy="174240"/>
+          <a:xfrm>
+            <a:off x="2646000" y="536400"/>
+            <a:ext cx="36000" cy="36000"/>
           </a:xfrm>
           <a:prstGeom prst="ellipse">
             <a:avLst/>
           </a:prstGeom>
           <a:solidFill>
-            <a:srgbClr val="B8517C"/>
+            <a:srgbClr val="0057FF"/>
           </a:solidFill>
           <a:ln>
             <a:noFill/>
@@ -3220,15 +3220,15 @@
           <p:nvPr/>
         </p:nvSpPr>
         <p:spPr>
-          <a:xfrm rot="12960000">
-            <a:off x="2772657" y="421769"/>
-            <a:ext cx="102960" cy="174240"/>
+          <a:xfrm>
+            <a:off x="2746800" y="234000"/>
+            <a:ext cx="36000" cy="36000"/>
           </a:xfrm>
           <a:prstGeom prst="ellipse">
             <a:avLst/>
           </a:prstGeom>
           <a:solidFill>
-            <a:srgbClr val="B8517C"/>
+            <a:srgbClr val="DBE7FF"/>
           </a:solidFill>
           <a:ln>
             <a:noFill/>
@@ -3249,15 +3249,15 @@
           <p:nvPr/>
         </p:nvSpPr>
         <p:spPr>
-          <a:xfrm rot="17280000">
-            <a:off x="2738132" y="315511"/>
-            <a:ext cx="102960" cy="174240"/>
+          <a:xfrm>
+            <a:off x="2746800" y="334800"/>
+            <a:ext cx="36000" cy="36000"/>
           </a:xfrm>
           <a:prstGeom prst="ellipse">
             <a:avLst/>
           </a:prstGeom>
           <a:solidFill>
-            <a:srgbClr val="B8517C"/>
+            <a:srgbClr val="DBE7FF"/>
           </a:solidFill>
           <a:ln>
             <a:noFill/>
@@ -3279,14 +3279,14 @@
         </p:nvSpPr>
         <p:spPr>
           <a:xfrm>
-            <a:off x="2836440" y="388440"/>
-            <a:ext cx="87120" cy="87120"/>
+            <a:off x="2746800" y="435600"/>
+            <a:ext cx="36000" cy="36000"/>
           </a:xfrm>
           <a:prstGeom prst="ellipse">
             <a:avLst/>
           </a:prstGeom>
           <a:solidFill>
-            <a:srgbClr val="F4E0E8"/>
+            <a:srgbClr val="0057FF"/>
           </a:solidFill>
           <a:ln>
             <a:noFill/>
@@ -3302,14 +3302,391 @@
       </p:sp>
       <p:sp>
         <p:nvSpPr>
-          <p:cNvPr id="9" name="텍스트"/>
+          <p:cNvPr id="9" name="Oval 8"/>
+          <p:cNvSpPr/>
+          <p:nvPr/>
+        </p:nvSpPr>
+        <p:spPr>
+          <a:xfrm>
+            <a:off x="2746800" y="536400"/>
+            <a:ext cx="36000" cy="36000"/>
+          </a:xfrm>
+          <a:prstGeom prst="ellipse">
+            <a:avLst/>
+          </a:prstGeom>
+          <a:solidFill>
+            <a:srgbClr val="DBE7FF"/>
+          </a:solidFill>
+          <a:ln>
+            <a:noFill/>
+          </a:ln>
+        </p:spPr>
+        <p:txBody>
+          <a:bodyPr rtlCol="0" anchor="ctr"/>
+          <a:lstStyle/>
+          <a:p>
+            <a:pPr algn="ctr"/>
+          </a:p>
+        </p:txBody>
+      </p:sp>
+      <p:sp>
+        <p:nvSpPr>
+          <p:cNvPr id="10" name="Oval 9"/>
+          <p:cNvSpPr/>
+          <p:nvPr/>
+        </p:nvSpPr>
+        <p:spPr>
+          <a:xfrm>
+            <a:off x="2847600" y="234000"/>
+            <a:ext cx="36000" cy="36000"/>
+          </a:xfrm>
+          <a:prstGeom prst="ellipse">
+            <a:avLst/>
+          </a:prstGeom>
+          <a:solidFill>
+            <a:srgbClr val="DBE7FF"/>
+          </a:solidFill>
+          <a:ln>
+            <a:noFill/>
+          </a:ln>
+        </p:spPr>
+        <p:txBody>
+          <a:bodyPr rtlCol="0" anchor="ctr"/>
+          <a:lstStyle/>
+          <a:p>
+            <a:pPr algn="ctr"/>
+          </a:p>
+        </p:txBody>
+      </p:sp>
+      <p:sp>
+        <p:nvSpPr>
+          <p:cNvPr id="11" name="Oval 10"/>
+          <p:cNvSpPr/>
+          <p:nvPr/>
+        </p:nvSpPr>
+        <p:spPr>
+          <a:xfrm>
+            <a:off x="2847600" y="334800"/>
+            <a:ext cx="36000" cy="36000"/>
+          </a:xfrm>
+          <a:prstGeom prst="ellipse">
+            <a:avLst/>
+          </a:prstGeom>
+          <a:solidFill>
+            <a:srgbClr val="0057FF"/>
+          </a:solidFill>
+          <a:ln>
+            <a:noFill/>
+          </a:ln>
+        </p:spPr>
+        <p:txBody>
+          <a:bodyPr rtlCol="0" anchor="ctr"/>
+          <a:lstStyle/>
+          <a:p>
+            <a:pPr algn="ctr"/>
+          </a:p>
+        </p:txBody>
+      </p:sp>
+      <p:sp>
+        <p:nvSpPr>
+          <p:cNvPr id="12" name="Oval 11"/>
+          <p:cNvSpPr/>
+          <p:nvPr/>
+        </p:nvSpPr>
+        <p:spPr>
+          <a:xfrm>
+            <a:off x="2847600" y="435600"/>
+            <a:ext cx="36000" cy="36000"/>
+          </a:xfrm>
+          <a:prstGeom prst="ellipse">
+            <a:avLst/>
+          </a:prstGeom>
+          <a:solidFill>
+            <a:srgbClr val="DBE7FF"/>
+          </a:solidFill>
+          <a:ln>
+            <a:noFill/>
+          </a:ln>
+        </p:spPr>
+        <p:txBody>
+          <a:bodyPr rtlCol="0" anchor="ctr"/>
+          <a:lstStyle/>
+          <a:p>
+            <a:pPr algn="ctr"/>
+          </a:p>
+        </p:txBody>
+      </p:sp>
+      <p:sp>
+        <p:nvSpPr>
+          <p:cNvPr id="13" name="Oval 12"/>
+          <p:cNvSpPr/>
+          <p:nvPr/>
+        </p:nvSpPr>
+        <p:spPr>
+          <a:xfrm>
+            <a:off x="2847600" y="536400"/>
+            <a:ext cx="36000" cy="36000"/>
+          </a:xfrm>
+          <a:prstGeom prst="ellipse">
+            <a:avLst/>
+          </a:prstGeom>
+          <a:solidFill>
+            <a:srgbClr val="DBE7FF"/>
+          </a:solidFill>
+          <a:ln>
+            <a:noFill/>
+          </a:ln>
+        </p:spPr>
+        <p:txBody>
+          <a:bodyPr rtlCol="0" anchor="ctr"/>
+          <a:lstStyle/>
+          <a:p>
+            <a:pPr algn="ctr"/>
+          </a:p>
+        </p:txBody>
+      </p:sp>
+      <p:sp>
+        <p:nvSpPr>
+          <p:cNvPr id="14" name="Oval 13"/>
+          <p:cNvSpPr/>
+          <p:nvPr/>
+        </p:nvSpPr>
+        <p:spPr>
+          <a:xfrm>
+            <a:off x="2948400" y="234000"/>
+            <a:ext cx="36000" cy="36000"/>
+          </a:xfrm>
+          <a:prstGeom prst="ellipse">
+            <a:avLst/>
+          </a:prstGeom>
+          <a:solidFill>
+            <a:srgbClr val="0057FF"/>
+          </a:solidFill>
+          <a:ln>
+            <a:noFill/>
+          </a:ln>
+        </p:spPr>
+        <p:txBody>
+          <a:bodyPr rtlCol="0" anchor="ctr"/>
+          <a:lstStyle/>
+          <a:p>
+            <a:pPr algn="ctr"/>
+          </a:p>
+        </p:txBody>
+      </p:sp>
+      <p:sp>
+        <p:nvSpPr>
+          <p:cNvPr id="15" name="Oval 14"/>
+          <p:cNvSpPr/>
+          <p:nvPr/>
+        </p:nvSpPr>
+        <p:spPr>
+          <a:xfrm>
+            <a:off x="2948400" y="334800"/>
+            <a:ext cx="36000" cy="36000"/>
+          </a:xfrm>
+          <a:prstGeom prst="ellipse">
+            <a:avLst/>
+          </a:prstGeom>
+          <a:solidFill>
+            <a:srgbClr val="DBE7FF"/>
+          </a:solidFill>
+          <a:ln>
+            <a:noFill/>
+          </a:ln>
+        </p:spPr>
+        <p:txBody>
+          <a:bodyPr rtlCol="0" anchor="ctr"/>
+          <a:lstStyle/>
+          <a:p>
+            <a:pPr algn="ctr"/>
+          </a:p>
+        </p:txBody>
+      </p:sp>
+      <p:sp>
+        <p:nvSpPr>
+          <p:cNvPr id="16" name="Oval 15"/>
+          <p:cNvSpPr/>
+          <p:nvPr/>
+        </p:nvSpPr>
+        <p:spPr>
+          <a:xfrm>
+            <a:off x="2948400" y="435600"/>
+            <a:ext cx="36000" cy="36000"/>
+          </a:xfrm>
+          <a:prstGeom prst="ellipse">
+            <a:avLst/>
+          </a:prstGeom>
+          <a:solidFill>
+            <a:srgbClr val="DBE7FF"/>
+          </a:solidFill>
+          <a:ln>
+            <a:noFill/>
+          </a:ln>
+        </p:spPr>
+        <p:txBody>
+          <a:bodyPr rtlCol="0" anchor="ctr"/>
+          <a:lstStyle/>
+          <a:p>
+            <a:pPr algn="ctr"/>
+          </a:p>
+        </p:txBody>
+      </p:sp>
+      <p:sp>
+        <p:nvSpPr>
+          <p:cNvPr id="17" name="Oval 16"/>
+          <p:cNvSpPr/>
+          <p:nvPr/>
+        </p:nvSpPr>
+        <p:spPr>
+          <a:xfrm>
+            <a:off x="2948400" y="536400"/>
+            <a:ext cx="36000" cy="36000"/>
+          </a:xfrm>
+          <a:prstGeom prst="ellipse">
+            <a:avLst/>
+          </a:prstGeom>
+          <a:solidFill>
+            <a:srgbClr val="0057FF"/>
+          </a:solidFill>
+          <a:ln>
+            <a:noFill/>
+          </a:ln>
+        </p:spPr>
+        <p:txBody>
+          <a:bodyPr rtlCol="0" anchor="ctr"/>
+          <a:lstStyle/>
+          <a:p>
+            <a:pPr algn="ctr"/>
+          </a:p>
+        </p:txBody>
+      </p:sp>
+      <p:sp>
+        <p:nvSpPr>
+          <p:cNvPr id="18" name="Oval 17"/>
+          <p:cNvSpPr/>
+          <p:nvPr/>
+        </p:nvSpPr>
+        <p:spPr>
+          <a:xfrm>
+            <a:off x="3049200" y="234000"/>
+            <a:ext cx="36000" cy="36000"/>
+          </a:xfrm>
+          <a:prstGeom prst="ellipse">
+            <a:avLst/>
+          </a:prstGeom>
+          <a:solidFill>
+            <a:srgbClr val="DBE7FF"/>
+          </a:solidFill>
+          <a:ln>
+            <a:noFill/>
+          </a:ln>
+        </p:spPr>
+        <p:txBody>
+          <a:bodyPr rtlCol="0" anchor="ctr"/>
+          <a:lstStyle/>
+          <a:p>
+            <a:pPr algn="ctr"/>
+          </a:p>
+        </p:txBody>
+      </p:sp>
+      <p:sp>
+        <p:nvSpPr>
+          <p:cNvPr id="19" name="Oval 18"/>
+          <p:cNvSpPr/>
+          <p:nvPr/>
+        </p:nvSpPr>
+        <p:spPr>
+          <a:xfrm>
+            <a:off x="3049200" y="334800"/>
+            <a:ext cx="36000" cy="36000"/>
+          </a:xfrm>
+          <a:prstGeom prst="ellipse">
+            <a:avLst/>
+          </a:prstGeom>
+          <a:solidFill>
+            <a:srgbClr val="DBE7FF"/>
+          </a:solidFill>
+          <a:ln>
+            <a:noFill/>
+          </a:ln>
+        </p:spPr>
+        <p:txBody>
+          <a:bodyPr rtlCol="0" anchor="ctr"/>
+          <a:lstStyle/>
+          <a:p>
+            <a:pPr algn="ctr"/>
+          </a:p>
+        </p:txBody>
+      </p:sp>
+      <p:sp>
+        <p:nvSpPr>
+          <p:cNvPr id="20" name="Oval 19"/>
+          <p:cNvSpPr/>
+          <p:nvPr/>
+        </p:nvSpPr>
+        <p:spPr>
+          <a:xfrm>
+            <a:off x="3049200" y="435600"/>
+            <a:ext cx="36000" cy="36000"/>
+          </a:xfrm>
+          <a:prstGeom prst="ellipse">
+            <a:avLst/>
+          </a:prstGeom>
+          <a:solidFill>
+            <a:srgbClr val="0057FF"/>
+          </a:solidFill>
+          <a:ln>
+            <a:noFill/>
+          </a:ln>
+        </p:spPr>
+        <p:txBody>
+          <a:bodyPr rtlCol="0" anchor="ctr"/>
+          <a:lstStyle/>
+          <a:p>
+            <a:pPr algn="ctr"/>
+          </a:p>
+        </p:txBody>
+      </p:sp>
+      <p:sp>
+        <p:nvSpPr>
+          <p:cNvPr id="21" name="Oval 20"/>
+          <p:cNvSpPr/>
+          <p:nvPr/>
+        </p:nvSpPr>
+        <p:spPr>
+          <a:xfrm>
+            <a:off x="3049200" y="536400"/>
+            <a:ext cx="36000" cy="36000"/>
+          </a:xfrm>
+          <a:prstGeom prst="ellipse">
+            <a:avLst/>
+          </a:prstGeom>
+          <a:solidFill>
+            <a:srgbClr val="DBE7FF"/>
+          </a:solidFill>
+          <a:ln>
+            <a:noFill/>
+          </a:ln>
+        </p:spPr>
+        <p:txBody>
+          <a:bodyPr rtlCol="0" anchor="ctr"/>
+          <a:lstStyle/>
+          <a:p>
+            <a:pPr algn="ctr"/>
+          </a:p>
+        </p:txBody>
+      </p:sp>
+      <p:sp>
+        <p:nvSpPr>
+          <p:cNvPr id="22" name="텍스트"/>
           <p:cNvSpPr txBox="1"/>
           <p:nvPr/>
         </p:nvSpPr>
         <p:spPr>
           <a:xfrm>
-            <a:off x="216000" y="230400"/>
-            <a:ext cx="2160000" cy="313692"/>
+            <a:off x="252000" y="223200"/>
+            <a:ext cx="1440000" cy="133351"/>
           </a:xfrm>
           <a:prstGeom prst="rect">
             <a:avLst/>
@@ -3324,13 +3701,53 @@
           <a:p>
             <a:pPr algn="l">
               <a:lnSpc>
-                <a:spcPts val="2755"/>
+                <a:spcPts val="1015"/>
               </a:lnSpc>
             </a:pPr>
             <a:r>
-              <a:rPr sz="1900" b="1" spc="50">
+              <a:rPr sz="700" b="1" spc="200">
                 <a:solidFill>
-                  <a:srgbClr val="742F4C"/>
+                  <a:srgbClr val="6B7280"/>
+                </a:solidFill>
+                <a:latin typeface="맑은 고딕"/>
+                <a:ea typeface="맑은 고딕"/>
+              </a:rPr>
+              <a:t>상호명</a:t>
+            </a:r>
+          </a:p>
+        </p:txBody>
+      </p:sp>
+      <p:sp>
+        <p:nvSpPr>
+          <p:cNvPr id="23" name="텍스트"/>
+          <p:cNvSpPr txBox="1"/>
+          <p:nvPr/>
+        </p:nvSpPr>
+        <p:spPr>
+          <a:xfrm>
+            <a:off x="252000" y="770400"/>
+            <a:ext cx="2016000" cy="360000"/>
+          </a:xfrm>
+          <a:prstGeom prst="rect">
+            <a:avLst/>
+          </a:prstGeom>
+          <a:noFill/>
+        </p:spPr>
+        <p:txBody>
+          <a:bodyPr wrap="square" lIns="0" rIns="0" tIns="0" bIns="0" anchor="t">
+            <a:spAutoFit/>
+          </a:bodyPr>
+          <a:lstStyle/>
+          <a:p>
+            <a:pPr algn="l">
+              <a:lnSpc>
+                <a:spcPts val="3190"/>
+              </a:lnSpc>
+            </a:pPr>
+            <a:r>
+              <a:rPr sz="2200" b="1">
+                <a:solidFill>
+                  <a:srgbClr val="12151C"/>
                 </a:solidFill>
                 <a:latin typeface="맑은 고딕"/>
                 <a:ea typeface="맑은 고딕"/>
@@ -3342,14 +3759,14 @@
       </p:sp>
       <p:sp>
         <p:nvSpPr>
-          <p:cNvPr id="10" name="텍스트"/>
+          <p:cNvPr id="24" name="텍스트"/>
           <p:cNvSpPr txBox="1"/>
           <p:nvPr/>
         </p:nvSpPr>
         <p:spPr>
           <a:xfrm>
-            <a:off x="216000" y="525600"/>
-            <a:ext cx="2160000" cy="122400"/>
+            <a:off x="252000" y="1173600"/>
+            <a:ext cx="2016000" cy="171451"/>
           </a:xfrm>
           <a:prstGeom prst="rect">
             <a:avLst/>
@@ -3364,13 +3781,13 @@
           <a:p>
             <a:pPr algn="l">
               <a:lnSpc>
-                <a:spcPts val="1232"/>
+                <a:spcPts val="1305"/>
               </a:lnSpc>
             </a:pPr>
             <a:r>
-              <a:rPr sz="850" b="1">
+              <a:rPr sz="900" b="0">
                 <a:solidFill>
-                  <a:srgbClr val="AF4D76"/>
+                  <a:srgbClr val="6B7280"/>
                 </a:solidFill>
                 <a:latin typeface="맑은 고딕"/>
                 <a:ea typeface="맑은 고딕"/>
@@ -3382,14 +3799,14 @@
       </p:sp>
       <p:sp>
         <p:nvSpPr>
-          <p:cNvPr id="11" name="텍스트"/>
+          <p:cNvPr id="25" name="텍스트"/>
           <p:cNvSpPr txBox="1"/>
           <p:nvPr/>
         </p:nvSpPr>
         <p:spPr>
           <a:xfrm>
-            <a:off x="216000" y="770400"/>
-            <a:ext cx="2160000" cy="100800"/>
+            <a:off x="1620000" y="1339200"/>
+            <a:ext cx="1368000" cy="133351"/>
           </a:xfrm>
           <a:prstGeom prst="rect">
             <a:avLst/>
@@ -3402,95 +3819,15 @@
           </a:bodyPr>
           <a:lstStyle/>
           <a:p>
-            <a:pPr algn="l">
-              <a:lnSpc>
-                <a:spcPts val="1087"/>
-              </a:lnSpc>
-            </a:pPr>
-            <a:r>
-              <a:rPr sz="750" b="1" spc="150">
-                <a:solidFill>
-                  <a:srgbClr val="8B6273"/>
-                </a:solidFill>
-                <a:latin typeface="맑은 고딕"/>
-                <a:ea typeface="맑은 고딕"/>
-              </a:rPr>
-              <a:t>상호명</a:t>
-            </a:r>
-          </a:p>
-        </p:txBody>
-      </p:sp>
-      <p:sp>
-        <p:nvSpPr>
-          <p:cNvPr id="12" name="텍스트"/>
-          <p:cNvSpPr txBox="1"/>
-          <p:nvPr/>
-        </p:nvSpPr>
-        <p:spPr>
-          <a:xfrm>
-            <a:off x="216000" y="1432800"/>
-            <a:ext cx="122400" cy="108000"/>
-          </a:xfrm>
-          <a:prstGeom prst="rect">
-            <a:avLst/>
-          </a:prstGeom>
-          <a:noFill/>
-        </p:spPr>
-        <p:txBody>
-          <a:bodyPr wrap="square" lIns="0" rIns="0" tIns="0" bIns="0" anchor="t">
-            <a:spAutoFit/>
-          </a:bodyPr>
-          <a:lstStyle/>
-          <a:p>
-            <a:pPr algn="l">
+            <a:pPr algn="r">
               <a:lnSpc>
                 <a:spcPts val="1015"/>
               </a:lnSpc>
             </a:pPr>
             <a:r>
-              <a:rPr sz="700" b="1">
-                <a:solidFill>
-                  <a:srgbClr val="FFFFFF"/>
-                </a:solidFill>
-                <a:latin typeface="맑은 고딕"/>
-                <a:ea typeface="맑은 고딕"/>
-              </a:rPr>
-              <a:t>T</a:t>
-            </a:r>
-          </a:p>
-        </p:txBody>
-      </p:sp>
-      <p:sp>
-        <p:nvSpPr>
-          <p:cNvPr id="13" name="텍스트"/>
-          <p:cNvSpPr txBox="1"/>
-          <p:nvPr/>
-        </p:nvSpPr>
-        <p:spPr>
-          <a:xfrm>
-            <a:off x="360000" y="1432800"/>
-            <a:ext cx="1368000" cy="108000"/>
-          </a:xfrm>
-          <a:prstGeom prst="rect">
-            <a:avLst/>
-          </a:prstGeom>
-          <a:noFill/>
-        </p:spPr>
-        <p:txBody>
-          <a:bodyPr wrap="square" lIns="0" rIns="0" tIns="0" bIns="0" anchor="t">
-            <a:spAutoFit/>
-          </a:bodyPr>
-          <a:lstStyle/>
-          <a:p>
-            <a:pPr algn="l">
-              <a:lnSpc>
-                <a:spcPts val="1015"/>
-              </a:lnSpc>
-            </a:pPr>
-            <a:r>
               <a:rPr sz="700" b="0">
                 <a:solidFill>
-                  <a:srgbClr val="FFFFFF"/>
+                  <a:srgbClr val="12151C"/>
                 </a:solidFill>
                 <a:latin typeface="맑은 고딕"/>
                 <a:ea typeface="맑은 고딕"/>
@@ -3502,14 +3839,14 @@
       </p:sp>
       <p:sp>
         <p:nvSpPr>
-          <p:cNvPr id="14" name="텍스트"/>
+          <p:cNvPr id="26" name="텍스트"/>
           <p:cNvSpPr txBox="1"/>
           <p:nvPr/>
         </p:nvSpPr>
         <p:spPr>
           <a:xfrm>
-            <a:off x="216000" y="1576800"/>
-            <a:ext cx="122400" cy="108000"/>
+            <a:off x="1620000" y="1476000"/>
+            <a:ext cx="1368000" cy="133351"/>
           </a:xfrm>
           <a:prstGeom prst="rect">
             <a:avLst/>
@@ -3522,55 +3859,15 @@
           </a:bodyPr>
           <a:lstStyle/>
           <a:p>
-            <a:pPr algn="l">
+            <a:pPr algn="r">
               <a:lnSpc>
                 <a:spcPts val="1015"/>
               </a:lnSpc>
             </a:pPr>
             <a:r>
-              <a:rPr sz="700" b="1">
-                <a:solidFill>
-                  <a:srgbClr val="FFFFFF"/>
-                </a:solidFill>
-                <a:latin typeface="맑은 고딕"/>
-                <a:ea typeface="맑은 고딕"/>
-              </a:rPr>
-              <a:t>E</a:t>
-            </a:r>
-          </a:p>
-        </p:txBody>
-      </p:sp>
-      <p:sp>
-        <p:nvSpPr>
-          <p:cNvPr id="15" name="텍스트"/>
-          <p:cNvSpPr txBox="1"/>
-          <p:nvPr/>
-        </p:nvSpPr>
-        <p:spPr>
-          <a:xfrm>
-            <a:off x="360000" y="1576800"/>
-            <a:ext cx="1368000" cy="108000"/>
-          </a:xfrm>
-          <a:prstGeom prst="rect">
-            <a:avLst/>
-          </a:prstGeom>
-          <a:noFill/>
-        </p:spPr>
-        <p:txBody>
-          <a:bodyPr wrap="square" lIns="0" rIns="0" tIns="0" bIns="0" anchor="t">
-            <a:spAutoFit/>
-          </a:bodyPr>
-          <a:lstStyle/>
-          <a:p>
-            <a:pPr algn="l">
-              <a:lnSpc>
-                <a:spcPts val="1015"/>
-              </a:lnSpc>
-            </a:pPr>
-            <a:r>
               <a:rPr sz="700" b="0">
                 <a:solidFill>
-                  <a:srgbClr val="FFFFFF"/>
+                  <a:srgbClr val="12151C"/>
                 </a:solidFill>
                 <a:latin typeface="맑은 고딕"/>
                 <a:ea typeface="맑은 고딕"/>
@@ -3582,14 +3879,14 @@
       </p:sp>
       <p:sp>
         <p:nvSpPr>
-          <p:cNvPr id="16" name="텍스트"/>
+          <p:cNvPr id="27" name="텍스트"/>
           <p:cNvSpPr txBox="1"/>
           <p:nvPr/>
         </p:nvSpPr>
         <p:spPr>
           <a:xfrm>
-            <a:off x="1800000" y="1432800"/>
-            <a:ext cx="122400" cy="108000"/>
+            <a:off x="1620000" y="1612800"/>
+            <a:ext cx="1368000" cy="133351"/>
           </a:xfrm>
           <a:prstGeom prst="rect">
             <a:avLst/>
@@ -3602,55 +3899,15 @@
           </a:bodyPr>
           <a:lstStyle/>
           <a:p>
-            <a:pPr algn="l">
+            <a:pPr algn="r">
               <a:lnSpc>
                 <a:spcPts val="1015"/>
               </a:lnSpc>
             </a:pPr>
             <a:r>
-              <a:rPr sz="700" b="1">
-                <a:solidFill>
-                  <a:srgbClr val="FFFFFF"/>
-                </a:solidFill>
-                <a:latin typeface="맑은 고딕"/>
-                <a:ea typeface="맑은 고딕"/>
-              </a:rPr>
-              <a:t>A</a:t>
-            </a:r>
-          </a:p>
-        </p:txBody>
-      </p:sp>
-      <p:sp>
-        <p:nvSpPr>
-          <p:cNvPr id="17" name="텍스트"/>
-          <p:cNvSpPr txBox="1"/>
-          <p:nvPr/>
-        </p:nvSpPr>
-        <p:spPr>
-          <a:xfrm>
-            <a:off x="1944000" y="1432800"/>
-            <a:ext cx="1188000" cy="216000"/>
-          </a:xfrm>
-          <a:prstGeom prst="rect">
-            <a:avLst/>
-          </a:prstGeom>
-          <a:noFill/>
-        </p:spPr>
-        <p:txBody>
-          <a:bodyPr wrap="square" lIns="0" rIns="0" tIns="0" bIns="0" anchor="t">
-            <a:spAutoFit/>
-          </a:bodyPr>
-          <a:lstStyle/>
-          <a:p>
-            <a:pPr algn="l">
-              <a:lnSpc>
-                <a:spcPts val="1015"/>
-              </a:lnSpc>
-            </a:pPr>
-            <a:r>
               <a:rPr sz="700" b="0">
                 <a:solidFill>
-                  <a:srgbClr val="FFFFFF"/>
+                  <a:srgbClr val="12151C"/>
                 </a:solidFill>
                 <a:latin typeface="맑은 고딕"/>
                 <a:ea typeface="맑은 고딕"/>
@@ -3674,7 +3931,7 @@
     <p:bg>
       <p:bgPr>
         <a:solidFill>
-          <a:srgbClr val="742F4C"/>
+          <a:srgbClr val="FFFFFF"/>
         </a:solidFill>
         <a:effectLst/>
       </p:bgPr>
@@ -3688,20 +3945,20 @@
       <p:grpSpPr/>
       <p:sp>
         <p:nvSpPr>
-          <p:cNvPr id="2" name="Rectangle 1"/>
+          <p:cNvPr id="2" name="Oval 1"/>
           <p:cNvSpPr/>
           <p:nvPr/>
         </p:nvSpPr>
         <p:spPr>
           <a:xfrm>
-            <a:off x="0" y="0"/>
-            <a:ext cx="64800" cy="1800000"/>
-          </a:xfrm>
-          <a:prstGeom prst="rect">
+            <a:off x="1411200" y="295200"/>
+            <a:ext cx="417600" cy="417600"/>
+          </a:xfrm>
+          <a:prstGeom prst="ellipse">
             <a:avLst/>
           </a:prstGeom>
           <a:solidFill>
-            <a:srgbClr val="CC82A1"/>
+            <a:srgbClr val="0057FF"/>
           </a:solidFill>
           <a:ln>
             <a:noFill/>
@@ -3723,8 +3980,8 @@
         </p:nvSpPr>
         <p:spPr>
           <a:xfrm>
-            <a:off x="252000" y="432000"/>
-            <a:ext cx="2016000" cy="252000"/>
+            <a:off x="1368000" y="324000"/>
+            <a:ext cx="504000" cy="360000"/>
           </a:xfrm>
           <a:prstGeom prst="rect">
             <a:avLst/>
@@ -3732,25 +3989,25 @@
           <a:noFill/>
         </p:spPr>
         <p:txBody>
-          <a:bodyPr wrap="square" lIns="0" rIns="0" tIns="0" bIns="0" anchor="t">
+          <a:bodyPr wrap="square" lIns="0" rIns="0" tIns="0" bIns="0" anchor="ctr">
             <a:spAutoFit/>
           </a:bodyPr>
           <a:lstStyle/>
           <a:p>
-            <a:pPr algn="l">
+            <a:pPr algn="ctr">
               <a:lnSpc>
-                <a:spcPts val="2465"/>
+                <a:spcPts val="3769"/>
               </a:lnSpc>
             </a:pPr>
             <a:r>
-              <a:rPr sz="1700" b="1">
+              <a:rPr sz="2600" b="1">
                 <a:solidFill>
                   <a:srgbClr val="FFFFFF"/>
                 </a:solidFill>
                 <a:latin typeface="맑은 고딕"/>
                 <a:ea typeface="맑은 고딕"/>
               </a:rPr>
-              <a:t>상호명</a:t>
+              <a:t>상</a:t>
             </a:r>
           </a:p>
         </p:txBody>
@@ -3763,8 +4020,8 @@
         </p:nvSpPr>
         <p:spPr>
           <a:xfrm>
-            <a:off x="252000" y="878400"/>
-            <a:ext cx="2016000" cy="540000"/>
+            <a:off x="360000" y="820800"/>
+            <a:ext cx="2520000" cy="161926"/>
           </a:xfrm>
           <a:prstGeom prst="rect">
             <a:avLst/>
@@ -3777,20 +4034,20 @@
           </a:bodyPr>
           <a:lstStyle/>
           <a:p>
-            <a:pPr algn="l">
+            <a:pPr algn="ctr">
               <a:lnSpc>
                 <a:spcPts val="1232"/>
               </a:lnSpc>
             </a:pPr>
             <a:r>
-              <a:rPr sz="850" b="0">
+              <a:rPr sz="850" b="1" spc="200">
                 <a:solidFill>
-                  <a:srgbClr val="CEB6C0"/>
+                  <a:srgbClr val="12151C"/>
                 </a:solidFill>
-                <a:latin typeface="바탕"/>
-                <a:ea typeface="바탕"/>
+                <a:latin typeface="맑은 고딕"/>
+                <a:ea typeface="맑은 고딕"/>
               </a:rPr>
-              <a:t>계절을 앞서 준비해 두었습니다</a:t>
+              <a:t>상호명</a:t>
             </a:r>
           </a:p>
         </p:txBody>
@@ -3803,46 +4060,45 @@
         </p:nvSpPr>
         <p:spPr>
           <a:xfrm>
-            <a:off x="2520000" y="1080000"/>
-            <a:ext cx="504000" cy="504000"/>
+            <a:off x="1530000" y="1051200"/>
+            <a:ext cx="180000" cy="14400"/>
+          </a:xfrm>
+          <a:prstGeom prst="rect">
+            <a:avLst/>
+          </a:prstGeom>
+          <a:solidFill>
+            <a:srgbClr val="0057FF"/>
+          </a:solidFill>
+          <a:ln>
+            <a:noFill/>
+          </a:ln>
+        </p:spPr>
+        <p:txBody>
+          <a:bodyPr rtlCol="0" anchor="ctr"/>
+          <a:lstStyle/>
+          <a:p>
+            <a:pPr algn="ctr"/>
+          </a:p>
+        </p:txBody>
+      </p:sp>
+      <p:sp>
+        <p:nvSpPr>
+          <p:cNvPr id="6" name="텍스트"/>
+          <p:cNvSpPr txBox="1"/>
+          <p:nvPr/>
+        </p:nvSpPr>
+        <p:spPr>
+          <a:xfrm>
+            <a:off x="540000" y="1188000"/>
+            <a:ext cx="2160000" cy="360000"/>
           </a:xfrm>
           <a:prstGeom prst="rect">
             <a:avLst/>
           </a:prstGeom>
           <a:noFill/>
-          <a:ln w="9000">
-            <a:solidFill>
-              <a:srgbClr val="CC82A1"/>
-            </a:solidFill>
-            <a:prstDash val="dash"/>
-          </a:ln>
-        </p:spPr>
-        <p:txBody>
-          <a:bodyPr rtlCol="0" anchor="ctr"/>
-          <a:lstStyle/>
-          <a:p>
-            <a:pPr algn="ctr"/>
-          </a:p>
-        </p:txBody>
-      </p:sp>
-      <p:sp>
-        <p:nvSpPr>
-          <p:cNvPr id="6" name="텍스트"/>
-          <p:cNvSpPr txBox="1"/>
-          <p:nvPr/>
-        </p:nvSpPr>
-        <p:spPr>
-          <a:xfrm>
-            <a:off x="2520000" y="1080000"/>
-            <a:ext cx="504000" cy="504000"/>
-          </a:xfrm>
-          <a:prstGeom prst="rect">
-            <a:avLst/>
-          </a:prstGeom>
-          <a:noFill/>
-        </p:spPr>
-        <p:txBody>
-          <a:bodyPr wrap="square" lIns="0" rIns="0" tIns="0" bIns="0" anchor="ctr">
+        </p:spPr>
+        <p:txBody>
+          <a:bodyPr wrap="square" lIns="0" rIns="0" tIns="0" bIns="0" anchor="t">
             <a:spAutoFit/>
           </a:bodyPr>
           <a:lstStyle/>
@@ -3855,216 +4111,13 @@
             <a:r>
               <a:rPr sz="900" b="1">
                 <a:solidFill>
-                  <a:srgbClr val="CEB6C0"/>
+                  <a:srgbClr val="6B7280"/>
                 </a:solidFill>
                 <a:latin typeface="맑은 고딕"/>
                 <a:ea typeface="맑은 고딕"/>
               </a:rPr>
-              <a:t>QR</a:t>
-            </a:r>
-          </a:p>
-        </p:txBody>
-      </p:sp>
-      <p:sp>
-        <p:nvSpPr>
-          <p:cNvPr id="7" name="Rectangle 6"/>
-          <p:cNvSpPr/>
-          <p:nvPr/>
-        </p:nvSpPr>
-        <p:spPr>
-          <a:xfrm>
-            <a:off x="252000" y="763200"/>
-            <a:ext cx="201600" cy="14400"/>
-          </a:xfrm>
-          <a:prstGeom prst="rect">
-            <a:avLst/>
-          </a:prstGeom>
-          <a:solidFill>
-            <a:srgbClr val="CC82A1"/>
-          </a:solidFill>
-          <a:ln>
-            <a:noFill/>
-          </a:ln>
-        </p:spPr>
-        <p:txBody>
-          <a:bodyPr rtlCol="0" anchor="ctr"/>
-          <a:lstStyle/>
-          <a:p>
-            <a:pPr algn="ctr"/>
-          </a:p>
-        </p:txBody>
-      </p:sp>
-      <p:sp>
-        <p:nvSpPr>
-          <p:cNvPr id="8" name="Oval 7"/>
-          <p:cNvSpPr/>
-          <p:nvPr/>
-        </p:nvSpPr>
-        <p:spPr>
-          <a:xfrm>
-            <a:off x="2729880" y="282960"/>
-            <a:ext cx="84240" cy="142560"/>
-          </a:xfrm>
-          <a:prstGeom prst="ellipse">
-            <a:avLst/>
-          </a:prstGeom>
-          <a:solidFill>
-            <a:srgbClr val="CC82A1"/>
-          </a:solidFill>
-          <a:ln>
-            <a:noFill/>
-          </a:ln>
-        </p:spPr>
-        <p:txBody>
-          <a:bodyPr rtlCol="0" anchor="ctr"/>
-          <a:lstStyle/>
-          <a:p>
-            <a:pPr algn="ctr"/>
-          </a:p>
-        </p:txBody>
-      </p:sp>
-      <p:sp>
-        <p:nvSpPr>
-          <p:cNvPr id="9" name="Oval 8"/>
-          <p:cNvSpPr/>
-          <p:nvPr/>
-        </p:nvSpPr>
-        <p:spPr>
-          <a:xfrm rot="4320000">
-            <a:off x="2803834" y="336691"/>
-            <a:ext cx="84240" cy="142560"/>
-          </a:xfrm>
-          <a:prstGeom prst="ellipse">
-            <a:avLst/>
-          </a:prstGeom>
-          <a:solidFill>
-            <a:srgbClr val="CC82A1"/>
-          </a:solidFill>
-          <a:ln>
-            <a:noFill/>
-          </a:ln>
-        </p:spPr>
-        <p:txBody>
-          <a:bodyPr rtlCol="0" anchor="ctr"/>
-          <a:lstStyle/>
-          <a:p>
-            <a:pPr algn="ctr"/>
-          </a:p>
-        </p:txBody>
-      </p:sp>
-      <p:sp>
-        <p:nvSpPr>
-          <p:cNvPr id="10" name="Oval 9"/>
-          <p:cNvSpPr/>
-          <p:nvPr/>
-        </p:nvSpPr>
-        <p:spPr>
-          <a:xfrm rot="8640000">
-            <a:off x="2775586" y="423629"/>
-            <a:ext cx="84240" cy="142560"/>
-          </a:xfrm>
-          <a:prstGeom prst="ellipse">
-            <a:avLst/>
-          </a:prstGeom>
-          <a:solidFill>
-            <a:srgbClr val="CC82A1"/>
-          </a:solidFill>
-          <a:ln>
-            <a:noFill/>
-          </a:ln>
-        </p:spPr>
-        <p:txBody>
-          <a:bodyPr rtlCol="0" anchor="ctr"/>
-          <a:lstStyle/>
-          <a:p>
-            <a:pPr algn="ctr"/>
-          </a:p>
-        </p:txBody>
-      </p:sp>
-      <p:sp>
-        <p:nvSpPr>
-          <p:cNvPr id="11" name="Oval 10"/>
-          <p:cNvSpPr/>
-          <p:nvPr/>
-        </p:nvSpPr>
-        <p:spPr>
-          <a:xfrm rot="12960000">
-            <a:off x="2684174" y="423629"/>
-            <a:ext cx="84240" cy="142560"/>
-          </a:xfrm>
-          <a:prstGeom prst="ellipse">
-            <a:avLst/>
-          </a:prstGeom>
-          <a:solidFill>
-            <a:srgbClr val="CC82A1"/>
-          </a:solidFill>
-          <a:ln>
-            <a:noFill/>
-          </a:ln>
-        </p:spPr>
-        <p:txBody>
-          <a:bodyPr rtlCol="0" anchor="ctr"/>
-          <a:lstStyle/>
-          <a:p>
-            <a:pPr algn="ctr"/>
-          </a:p>
-        </p:txBody>
-      </p:sp>
-      <p:sp>
-        <p:nvSpPr>
-          <p:cNvPr id="12" name="Oval 11"/>
-          <p:cNvSpPr/>
-          <p:nvPr/>
-        </p:nvSpPr>
-        <p:spPr>
-          <a:xfrm rot="17280000">
-            <a:off x="2655926" y="336691"/>
-            <a:ext cx="84240" cy="142560"/>
-          </a:xfrm>
-          <a:prstGeom prst="ellipse">
-            <a:avLst/>
-          </a:prstGeom>
-          <a:solidFill>
-            <a:srgbClr val="CC82A1"/>
-          </a:solidFill>
-          <a:ln>
-            <a:noFill/>
-          </a:ln>
-        </p:spPr>
-        <p:txBody>
-          <a:bodyPr rtlCol="0" anchor="ctr"/>
-          <a:lstStyle/>
-          <a:p>
-            <a:pPr algn="ctr"/>
-          </a:p>
-        </p:txBody>
-      </p:sp>
-      <p:sp>
-        <p:nvSpPr>
-          <p:cNvPr id="13" name="Oval 12"/>
-          <p:cNvSpPr/>
-          <p:nvPr/>
-        </p:nvSpPr>
-        <p:spPr>
-          <a:xfrm>
-            <a:off x="2736360" y="396360"/>
-            <a:ext cx="71280" cy="71280"/>
-          </a:xfrm>
-          <a:prstGeom prst="ellipse">
-            <a:avLst/>
-          </a:prstGeom>
-          <a:solidFill>
-            <a:srgbClr val="8A5069"/>
-          </a:solidFill>
-          <a:ln>
-            <a:noFill/>
-          </a:ln>
-        </p:spPr>
-        <p:txBody>
-          <a:bodyPr rtlCol="0" anchor="ctr"/>
-          <a:lstStyle/>
-          <a:p>
-            <a:pPr algn="ctr"/>
+              <a:t>계절을 앞서 준비해 두었습니다</a:t>
+            </a:r>
           </a:p>
         </p:txBody>
       </p:sp>

--- a/public/fun/cards/life/life-36.pptx
+++ b/public/fun/cards/life/life-36.pptx
@@ -3099,16 +3099,45 @@
       <p:grpSpPr/>
       <p:sp>
         <p:nvSpPr>
-          <p:cNvPr id="2" name="Oval 1"/>
+          <p:cNvPr id="2" name="Rectangle 1"/>
           <p:cNvSpPr/>
           <p:nvPr/>
         </p:nvSpPr>
         <p:spPr>
           <a:xfrm>
-            <a:off x="2646000" y="234000"/>
-            <a:ext cx="36000" cy="36000"/>
-          </a:xfrm>
-          <a:prstGeom prst="ellipse">
+            <a:off x="0" y="1296000"/>
+            <a:ext cx="3240000" cy="504000"/>
+          </a:xfrm>
+          <a:prstGeom prst="rect">
+            <a:avLst/>
+          </a:prstGeom>
+          <a:solidFill>
+            <a:srgbClr val="DBE7FF"/>
+          </a:solidFill>
+          <a:ln>
+            <a:noFill/>
+          </a:ln>
+        </p:spPr>
+        <p:txBody>
+          <a:bodyPr rtlCol="0" anchor="ctr"/>
+          <a:lstStyle/>
+          <a:p>
+            <a:pPr algn="ctr"/>
+          </a:p>
+        </p:txBody>
+      </p:sp>
+      <p:sp>
+        <p:nvSpPr>
+          <p:cNvPr id="3" name="Rectangle 2"/>
+          <p:cNvSpPr/>
+          <p:nvPr/>
+        </p:nvSpPr>
+        <p:spPr>
+          <a:xfrm>
+            <a:off x="0" y="1296000"/>
+            <a:ext cx="3240000" cy="14400"/>
+          </a:xfrm>
+          <a:prstGeom prst="rect">
             <a:avLst/>
           </a:prstGeom>
           <a:solidFill>
@@ -3128,565 +3157,14 @@
       </p:sp>
       <p:sp>
         <p:nvSpPr>
-          <p:cNvPr id="3" name="Oval 2"/>
-          <p:cNvSpPr/>
-          <p:nvPr/>
-        </p:nvSpPr>
-        <p:spPr>
-          <a:xfrm>
-            <a:off x="2646000" y="334800"/>
-            <a:ext cx="36000" cy="36000"/>
-          </a:xfrm>
-          <a:prstGeom prst="ellipse">
-            <a:avLst/>
-          </a:prstGeom>
-          <a:solidFill>
-            <a:srgbClr val="DBE7FF"/>
-          </a:solidFill>
-          <a:ln>
-            <a:noFill/>
-          </a:ln>
-        </p:spPr>
-        <p:txBody>
-          <a:bodyPr rtlCol="0" anchor="ctr"/>
-          <a:lstStyle/>
-          <a:p>
-            <a:pPr algn="ctr"/>
-          </a:p>
-        </p:txBody>
-      </p:sp>
-      <p:sp>
-        <p:nvSpPr>
-          <p:cNvPr id="4" name="Oval 3"/>
-          <p:cNvSpPr/>
-          <p:nvPr/>
-        </p:nvSpPr>
-        <p:spPr>
-          <a:xfrm>
-            <a:off x="2646000" y="435600"/>
-            <a:ext cx="36000" cy="36000"/>
-          </a:xfrm>
-          <a:prstGeom prst="ellipse">
-            <a:avLst/>
-          </a:prstGeom>
-          <a:solidFill>
-            <a:srgbClr val="DBE7FF"/>
-          </a:solidFill>
-          <a:ln>
-            <a:noFill/>
-          </a:ln>
-        </p:spPr>
-        <p:txBody>
-          <a:bodyPr rtlCol="0" anchor="ctr"/>
-          <a:lstStyle/>
-          <a:p>
-            <a:pPr algn="ctr"/>
-          </a:p>
-        </p:txBody>
-      </p:sp>
-      <p:sp>
-        <p:nvSpPr>
-          <p:cNvPr id="5" name="Oval 4"/>
-          <p:cNvSpPr/>
-          <p:nvPr/>
-        </p:nvSpPr>
-        <p:spPr>
-          <a:xfrm>
-            <a:off x="2646000" y="536400"/>
-            <a:ext cx="36000" cy="36000"/>
-          </a:xfrm>
-          <a:prstGeom prst="ellipse">
-            <a:avLst/>
-          </a:prstGeom>
-          <a:solidFill>
-            <a:srgbClr val="0057FF"/>
-          </a:solidFill>
-          <a:ln>
-            <a:noFill/>
-          </a:ln>
-        </p:spPr>
-        <p:txBody>
-          <a:bodyPr rtlCol="0" anchor="ctr"/>
-          <a:lstStyle/>
-          <a:p>
-            <a:pPr algn="ctr"/>
-          </a:p>
-        </p:txBody>
-      </p:sp>
-      <p:sp>
-        <p:nvSpPr>
-          <p:cNvPr id="6" name="Oval 5"/>
-          <p:cNvSpPr/>
-          <p:nvPr/>
-        </p:nvSpPr>
-        <p:spPr>
-          <a:xfrm>
-            <a:off x="2746800" y="234000"/>
-            <a:ext cx="36000" cy="36000"/>
-          </a:xfrm>
-          <a:prstGeom prst="ellipse">
-            <a:avLst/>
-          </a:prstGeom>
-          <a:solidFill>
-            <a:srgbClr val="DBE7FF"/>
-          </a:solidFill>
-          <a:ln>
-            <a:noFill/>
-          </a:ln>
-        </p:spPr>
-        <p:txBody>
-          <a:bodyPr rtlCol="0" anchor="ctr"/>
-          <a:lstStyle/>
-          <a:p>
-            <a:pPr algn="ctr"/>
-          </a:p>
-        </p:txBody>
-      </p:sp>
-      <p:sp>
-        <p:nvSpPr>
-          <p:cNvPr id="7" name="Oval 6"/>
-          <p:cNvSpPr/>
-          <p:nvPr/>
-        </p:nvSpPr>
-        <p:spPr>
-          <a:xfrm>
-            <a:off x="2746800" y="334800"/>
-            <a:ext cx="36000" cy="36000"/>
-          </a:xfrm>
-          <a:prstGeom prst="ellipse">
-            <a:avLst/>
-          </a:prstGeom>
-          <a:solidFill>
-            <a:srgbClr val="DBE7FF"/>
-          </a:solidFill>
-          <a:ln>
-            <a:noFill/>
-          </a:ln>
-        </p:spPr>
-        <p:txBody>
-          <a:bodyPr rtlCol="0" anchor="ctr"/>
-          <a:lstStyle/>
-          <a:p>
-            <a:pPr algn="ctr"/>
-          </a:p>
-        </p:txBody>
-      </p:sp>
-      <p:sp>
-        <p:nvSpPr>
-          <p:cNvPr id="8" name="Oval 7"/>
-          <p:cNvSpPr/>
-          <p:nvPr/>
-        </p:nvSpPr>
-        <p:spPr>
-          <a:xfrm>
-            <a:off x="2746800" y="435600"/>
-            <a:ext cx="36000" cy="36000"/>
-          </a:xfrm>
-          <a:prstGeom prst="ellipse">
-            <a:avLst/>
-          </a:prstGeom>
-          <a:solidFill>
-            <a:srgbClr val="0057FF"/>
-          </a:solidFill>
-          <a:ln>
-            <a:noFill/>
-          </a:ln>
-        </p:spPr>
-        <p:txBody>
-          <a:bodyPr rtlCol="0" anchor="ctr"/>
-          <a:lstStyle/>
-          <a:p>
-            <a:pPr algn="ctr"/>
-          </a:p>
-        </p:txBody>
-      </p:sp>
-      <p:sp>
-        <p:nvSpPr>
-          <p:cNvPr id="9" name="Oval 8"/>
-          <p:cNvSpPr/>
-          <p:nvPr/>
-        </p:nvSpPr>
-        <p:spPr>
-          <a:xfrm>
-            <a:off x="2746800" y="536400"/>
-            <a:ext cx="36000" cy="36000"/>
-          </a:xfrm>
-          <a:prstGeom prst="ellipse">
-            <a:avLst/>
-          </a:prstGeom>
-          <a:solidFill>
-            <a:srgbClr val="DBE7FF"/>
-          </a:solidFill>
-          <a:ln>
-            <a:noFill/>
-          </a:ln>
-        </p:spPr>
-        <p:txBody>
-          <a:bodyPr rtlCol="0" anchor="ctr"/>
-          <a:lstStyle/>
-          <a:p>
-            <a:pPr algn="ctr"/>
-          </a:p>
-        </p:txBody>
-      </p:sp>
-      <p:sp>
-        <p:nvSpPr>
-          <p:cNvPr id="10" name="Oval 9"/>
-          <p:cNvSpPr/>
-          <p:nvPr/>
-        </p:nvSpPr>
-        <p:spPr>
-          <a:xfrm>
-            <a:off x="2847600" y="234000"/>
-            <a:ext cx="36000" cy="36000"/>
-          </a:xfrm>
-          <a:prstGeom prst="ellipse">
-            <a:avLst/>
-          </a:prstGeom>
-          <a:solidFill>
-            <a:srgbClr val="DBE7FF"/>
-          </a:solidFill>
-          <a:ln>
-            <a:noFill/>
-          </a:ln>
-        </p:spPr>
-        <p:txBody>
-          <a:bodyPr rtlCol="0" anchor="ctr"/>
-          <a:lstStyle/>
-          <a:p>
-            <a:pPr algn="ctr"/>
-          </a:p>
-        </p:txBody>
-      </p:sp>
-      <p:sp>
-        <p:nvSpPr>
-          <p:cNvPr id="11" name="Oval 10"/>
-          <p:cNvSpPr/>
-          <p:nvPr/>
-        </p:nvSpPr>
-        <p:spPr>
-          <a:xfrm>
-            <a:off x="2847600" y="334800"/>
-            <a:ext cx="36000" cy="36000"/>
-          </a:xfrm>
-          <a:prstGeom prst="ellipse">
-            <a:avLst/>
-          </a:prstGeom>
-          <a:solidFill>
-            <a:srgbClr val="0057FF"/>
-          </a:solidFill>
-          <a:ln>
-            <a:noFill/>
-          </a:ln>
-        </p:spPr>
-        <p:txBody>
-          <a:bodyPr rtlCol="0" anchor="ctr"/>
-          <a:lstStyle/>
-          <a:p>
-            <a:pPr algn="ctr"/>
-          </a:p>
-        </p:txBody>
-      </p:sp>
-      <p:sp>
-        <p:nvSpPr>
-          <p:cNvPr id="12" name="Oval 11"/>
-          <p:cNvSpPr/>
-          <p:nvPr/>
-        </p:nvSpPr>
-        <p:spPr>
-          <a:xfrm>
-            <a:off x="2847600" y="435600"/>
-            <a:ext cx="36000" cy="36000"/>
-          </a:xfrm>
-          <a:prstGeom prst="ellipse">
-            <a:avLst/>
-          </a:prstGeom>
-          <a:solidFill>
-            <a:srgbClr val="DBE7FF"/>
-          </a:solidFill>
-          <a:ln>
-            <a:noFill/>
-          </a:ln>
-        </p:spPr>
-        <p:txBody>
-          <a:bodyPr rtlCol="0" anchor="ctr"/>
-          <a:lstStyle/>
-          <a:p>
-            <a:pPr algn="ctr"/>
-          </a:p>
-        </p:txBody>
-      </p:sp>
-      <p:sp>
-        <p:nvSpPr>
-          <p:cNvPr id="13" name="Oval 12"/>
-          <p:cNvSpPr/>
-          <p:nvPr/>
-        </p:nvSpPr>
-        <p:spPr>
-          <a:xfrm>
-            <a:off x="2847600" y="536400"/>
-            <a:ext cx="36000" cy="36000"/>
-          </a:xfrm>
-          <a:prstGeom prst="ellipse">
-            <a:avLst/>
-          </a:prstGeom>
-          <a:solidFill>
-            <a:srgbClr val="DBE7FF"/>
-          </a:solidFill>
-          <a:ln>
-            <a:noFill/>
-          </a:ln>
-        </p:spPr>
-        <p:txBody>
-          <a:bodyPr rtlCol="0" anchor="ctr"/>
-          <a:lstStyle/>
-          <a:p>
-            <a:pPr algn="ctr"/>
-          </a:p>
-        </p:txBody>
-      </p:sp>
-      <p:sp>
-        <p:nvSpPr>
-          <p:cNvPr id="14" name="Oval 13"/>
-          <p:cNvSpPr/>
-          <p:nvPr/>
-        </p:nvSpPr>
-        <p:spPr>
-          <a:xfrm>
-            <a:off x="2948400" y="234000"/>
-            <a:ext cx="36000" cy="36000"/>
-          </a:xfrm>
-          <a:prstGeom prst="ellipse">
-            <a:avLst/>
-          </a:prstGeom>
-          <a:solidFill>
-            <a:srgbClr val="0057FF"/>
-          </a:solidFill>
-          <a:ln>
-            <a:noFill/>
-          </a:ln>
-        </p:spPr>
-        <p:txBody>
-          <a:bodyPr rtlCol="0" anchor="ctr"/>
-          <a:lstStyle/>
-          <a:p>
-            <a:pPr algn="ctr"/>
-          </a:p>
-        </p:txBody>
-      </p:sp>
-      <p:sp>
-        <p:nvSpPr>
-          <p:cNvPr id="15" name="Oval 14"/>
-          <p:cNvSpPr/>
-          <p:nvPr/>
-        </p:nvSpPr>
-        <p:spPr>
-          <a:xfrm>
-            <a:off x="2948400" y="334800"/>
-            <a:ext cx="36000" cy="36000"/>
-          </a:xfrm>
-          <a:prstGeom prst="ellipse">
-            <a:avLst/>
-          </a:prstGeom>
-          <a:solidFill>
-            <a:srgbClr val="DBE7FF"/>
-          </a:solidFill>
-          <a:ln>
-            <a:noFill/>
-          </a:ln>
-        </p:spPr>
-        <p:txBody>
-          <a:bodyPr rtlCol="0" anchor="ctr"/>
-          <a:lstStyle/>
-          <a:p>
-            <a:pPr algn="ctr"/>
-          </a:p>
-        </p:txBody>
-      </p:sp>
-      <p:sp>
-        <p:nvSpPr>
-          <p:cNvPr id="16" name="Oval 15"/>
-          <p:cNvSpPr/>
-          <p:nvPr/>
-        </p:nvSpPr>
-        <p:spPr>
-          <a:xfrm>
-            <a:off x="2948400" y="435600"/>
-            <a:ext cx="36000" cy="36000"/>
-          </a:xfrm>
-          <a:prstGeom prst="ellipse">
-            <a:avLst/>
-          </a:prstGeom>
-          <a:solidFill>
-            <a:srgbClr val="DBE7FF"/>
-          </a:solidFill>
-          <a:ln>
-            <a:noFill/>
-          </a:ln>
-        </p:spPr>
-        <p:txBody>
-          <a:bodyPr rtlCol="0" anchor="ctr"/>
-          <a:lstStyle/>
-          <a:p>
-            <a:pPr algn="ctr"/>
-          </a:p>
-        </p:txBody>
-      </p:sp>
-      <p:sp>
-        <p:nvSpPr>
-          <p:cNvPr id="17" name="Oval 16"/>
-          <p:cNvSpPr/>
-          <p:nvPr/>
-        </p:nvSpPr>
-        <p:spPr>
-          <a:xfrm>
-            <a:off x="2948400" y="536400"/>
-            <a:ext cx="36000" cy="36000"/>
-          </a:xfrm>
-          <a:prstGeom prst="ellipse">
-            <a:avLst/>
-          </a:prstGeom>
-          <a:solidFill>
-            <a:srgbClr val="0057FF"/>
-          </a:solidFill>
-          <a:ln>
-            <a:noFill/>
-          </a:ln>
-        </p:spPr>
-        <p:txBody>
-          <a:bodyPr rtlCol="0" anchor="ctr"/>
-          <a:lstStyle/>
-          <a:p>
-            <a:pPr algn="ctr"/>
-          </a:p>
-        </p:txBody>
-      </p:sp>
-      <p:sp>
-        <p:nvSpPr>
-          <p:cNvPr id="18" name="Oval 17"/>
-          <p:cNvSpPr/>
-          <p:nvPr/>
-        </p:nvSpPr>
-        <p:spPr>
-          <a:xfrm>
-            <a:off x="3049200" y="234000"/>
-            <a:ext cx="36000" cy="36000"/>
-          </a:xfrm>
-          <a:prstGeom prst="ellipse">
-            <a:avLst/>
-          </a:prstGeom>
-          <a:solidFill>
-            <a:srgbClr val="DBE7FF"/>
-          </a:solidFill>
-          <a:ln>
-            <a:noFill/>
-          </a:ln>
-        </p:spPr>
-        <p:txBody>
-          <a:bodyPr rtlCol="0" anchor="ctr"/>
-          <a:lstStyle/>
-          <a:p>
-            <a:pPr algn="ctr"/>
-          </a:p>
-        </p:txBody>
-      </p:sp>
-      <p:sp>
-        <p:nvSpPr>
-          <p:cNvPr id="19" name="Oval 18"/>
-          <p:cNvSpPr/>
-          <p:nvPr/>
-        </p:nvSpPr>
-        <p:spPr>
-          <a:xfrm>
-            <a:off x="3049200" y="334800"/>
-            <a:ext cx="36000" cy="36000"/>
-          </a:xfrm>
-          <a:prstGeom prst="ellipse">
-            <a:avLst/>
-          </a:prstGeom>
-          <a:solidFill>
-            <a:srgbClr val="DBE7FF"/>
-          </a:solidFill>
-          <a:ln>
-            <a:noFill/>
-          </a:ln>
-        </p:spPr>
-        <p:txBody>
-          <a:bodyPr rtlCol="0" anchor="ctr"/>
-          <a:lstStyle/>
-          <a:p>
-            <a:pPr algn="ctr"/>
-          </a:p>
-        </p:txBody>
-      </p:sp>
-      <p:sp>
-        <p:nvSpPr>
-          <p:cNvPr id="20" name="Oval 19"/>
-          <p:cNvSpPr/>
-          <p:nvPr/>
-        </p:nvSpPr>
-        <p:spPr>
-          <a:xfrm>
-            <a:off x="3049200" y="435600"/>
-            <a:ext cx="36000" cy="36000"/>
-          </a:xfrm>
-          <a:prstGeom prst="ellipse">
-            <a:avLst/>
-          </a:prstGeom>
-          <a:solidFill>
-            <a:srgbClr val="0057FF"/>
-          </a:solidFill>
-          <a:ln>
-            <a:noFill/>
-          </a:ln>
-        </p:spPr>
-        <p:txBody>
-          <a:bodyPr rtlCol="0" anchor="ctr"/>
-          <a:lstStyle/>
-          <a:p>
-            <a:pPr algn="ctr"/>
-          </a:p>
-        </p:txBody>
-      </p:sp>
-      <p:sp>
-        <p:nvSpPr>
-          <p:cNvPr id="21" name="Oval 20"/>
-          <p:cNvSpPr/>
-          <p:nvPr/>
-        </p:nvSpPr>
-        <p:spPr>
-          <a:xfrm>
-            <a:off x="3049200" y="536400"/>
-            <a:ext cx="36000" cy="36000"/>
-          </a:xfrm>
-          <a:prstGeom prst="ellipse">
-            <a:avLst/>
-          </a:prstGeom>
-          <a:solidFill>
-            <a:srgbClr val="DBE7FF"/>
-          </a:solidFill>
-          <a:ln>
-            <a:noFill/>
-          </a:ln>
-        </p:spPr>
-        <p:txBody>
-          <a:bodyPr rtlCol="0" anchor="ctr"/>
-          <a:lstStyle/>
-          <a:p>
-            <a:pPr algn="ctr"/>
-          </a:p>
-        </p:txBody>
-      </p:sp>
-      <p:sp>
-        <p:nvSpPr>
-          <p:cNvPr id="22" name="텍스트"/>
+          <p:cNvPr id="4" name="텍스트"/>
           <p:cNvSpPr txBox="1"/>
           <p:nvPr/>
         </p:nvSpPr>
         <p:spPr>
           <a:xfrm>
-            <a:off x="252000" y="223200"/>
-            <a:ext cx="1440000" cy="133351"/>
+            <a:off x="252000" y="252000"/>
+            <a:ext cx="1512000" cy="123826"/>
           </a:xfrm>
           <a:prstGeom prst="rect">
             <a:avLst/>
@@ -3701,11 +3179,11 @@
           <a:p>
             <a:pPr algn="l">
               <a:lnSpc>
-                <a:spcPts val="1015"/>
+                <a:spcPts val="942"/>
               </a:lnSpc>
             </a:pPr>
             <a:r>
-              <a:rPr sz="700" b="1" spc="200">
+              <a:rPr sz="650" b="1" spc="220">
                 <a:solidFill>
                   <a:srgbClr val="6B7280"/>
                 </a:solidFill>
@@ -3719,14 +3197,14 @@
       </p:sp>
       <p:sp>
         <p:nvSpPr>
-          <p:cNvPr id="23" name="텍스트"/>
+          <p:cNvPr id="5" name="텍스트"/>
           <p:cNvSpPr txBox="1"/>
           <p:nvPr/>
         </p:nvSpPr>
         <p:spPr>
           <a:xfrm>
-            <a:off x="252000" y="770400"/>
-            <a:ext cx="2016000" cy="360000"/>
+            <a:off x="252000" y="576000"/>
+            <a:ext cx="1800000" cy="237600"/>
           </a:xfrm>
           <a:prstGeom prst="rect">
             <a:avLst/>
@@ -3741,11 +3219,11 @@
           <a:p>
             <a:pPr algn="l">
               <a:lnSpc>
-                <a:spcPts val="3190"/>
+                <a:spcPts val="1957"/>
               </a:lnSpc>
             </a:pPr>
             <a:r>
-              <a:rPr sz="2200" b="1">
+              <a:rPr sz="1350" b="1" spc="120">
                 <a:solidFill>
                   <a:srgbClr val="12151C"/>
                 </a:solidFill>
@@ -3759,14 +3237,14 @@
       </p:sp>
       <p:sp>
         <p:nvSpPr>
-          <p:cNvPr id="24" name="텍스트"/>
+          <p:cNvPr id="6" name="텍스트"/>
           <p:cNvSpPr txBox="1"/>
           <p:nvPr/>
         </p:nvSpPr>
         <p:spPr>
           <a:xfrm>
-            <a:off x="252000" y="1173600"/>
-            <a:ext cx="2016000" cy="171451"/>
+            <a:off x="252000" y="828000"/>
+            <a:ext cx="1800000" cy="133351"/>
           </a:xfrm>
           <a:prstGeom prst="rect">
             <a:avLst/>
@@ -3781,11 +3259,11 @@
           <a:p>
             <a:pPr algn="l">
               <a:lnSpc>
-                <a:spcPts val="1305"/>
+                <a:spcPts val="1015"/>
               </a:lnSpc>
             </a:pPr>
             <a:r>
-              <a:rPr sz="900" b="0">
+              <a:rPr sz="700" b="0" spc="60">
                 <a:solidFill>
                   <a:srgbClr val="6B7280"/>
                 </a:solidFill>
@@ -3799,14 +3277,14 @@
       </p:sp>
       <p:sp>
         <p:nvSpPr>
-          <p:cNvPr id="25" name="텍스트"/>
+          <p:cNvPr id="7" name="텍스트"/>
           <p:cNvSpPr txBox="1"/>
           <p:nvPr/>
         </p:nvSpPr>
         <p:spPr>
           <a:xfrm>
-            <a:off x="1620000" y="1339200"/>
-            <a:ext cx="1368000" cy="133351"/>
+            <a:off x="252000" y="1411200"/>
+            <a:ext cx="900000" cy="91441"/>
           </a:xfrm>
           <a:prstGeom prst="rect">
             <a:avLst/>
@@ -3819,13 +3297,53 @@
           </a:bodyPr>
           <a:lstStyle/>
           <a:p>
-            <a:pPr algn="r">
+            <a:pPr algn="l">
               <a:lnSpc>
-                <a:spcPts val="1015"/>
+                <a:spcPts val="696"/>
               </a:lnSpc>
             </a:pPr>
             <a:r>
-              <a:rPr sz="700" b="0">
+              <a:rPr sz="480" b="1" spc="140">
+                <a:solidFill>
+                  <a:srgbClr val="6B7280"/>
+                </a:solidFill>
+                <a:latin typeface="맑은 고딕"/>
+                <a:ea typeface="맑은 고딕"/>
+              </a:rPr>
+              <a:t>TEL</a:t>
+            </a:r>
+          </a:p>
+        </p:txBody>
+      </p:sp>
+      <p:sp>
+        <p:nvSpPr>
+          <p:cNvPr id="8" name="텍스트"/>
+          <p:cNvSpPr txBox="1"/>
+          <p:nvPr/>
+        </p:nvSpPr>
+        <p:spPr>
+          <a:xfrm>
+            <a:off x="252000" y="1512000"/>
+            <a:ext cx="900000" cy="120016"/>
+          </a:xfrm>
+          <a:prstGeom prst="rect">
+            <a:avLst/>
+          </a:prstGeom>
+          <a:noFill/>
+        </p:spPr>
+        <p:txBody>
+          <a:bodyPr wrap="square" lIns="0" rIns="0" tIns="0" bIns="0" anchor="t">
+            <a:spAutoFit/>
+          </a:bodyPr>
+          <a:lstStyle/>
+          <a:p>
+            <a:pPr algn="l">
+              <a:lnSpc>
+                <a:spcPts val="913"/>
+              </a:lnSpc>
+            </a:pPr>
+            <a:r>
+              <a:rPr sz="630" b="0">
                 <a:solidFill>
                   <a:srgbClr val="12151C"/>
                 </a:solidFill>
@@ -3837,16 +3355,37 @@
           </a:p>
         </p:txBody>
       </p:sp>
-      <p:sp>
-        <p:nvSpPr>
-          <p:cNvPr id="26" name="텍스트"/>
+      <p:cxnSp>
+        <p:nvCxnSpPr>
+          <p:cNvPr id="9" name="Connector 8"/>
+          <p:cNvCxnSpPr/>
+          <p:nvPr/>
+        </p:nvCxnSpPr>
+        <p:spPr>
+          <a:xfrm>
+            <a:off x="1072800" y="1411200"/>
+            <a:ext cx="0" cy="201600"/>
+          </a:xfrm>
+          <a:prstGeom prst="line">
+            <a:avLst/>
+          </a:prstGeom>
+          <a:ln w="3600">
+            <a:solidFill>
+              <a:srgbClr val="E3E5E9"/>
+            </a:solidFill>
+          </a:ln>
+        </p:spPr>
+      </p:cxnSp>
+      <p:sp>
+        <p:nvSpPr>
+          <p:cNvPr id="10" name="텍스트"/>
           <p:cNvSpPr txBox="1"/>
           <p:nvPr/>
         </p:nvSpPr>
         <p:spPr>
           <a:xfrm>
-            <a:off x="1620000" y="1476000"/>
-            <a:ext cx="1368000" cy="133351"/>
+            <a:off x="1152000" y="1411200"/>
+            <a:ext cx="1008000" cy="91441"/>
           </a:xfrm>
           <a:prstGeom prst="rect">
             <a:avLst/>
@@ -3859,13 +3398,53 @@
           </a:bodyPr>
           <a:lstStyle/>
           <a:p>
-            <a:pPr algn="r">
+            <a:pPr algn="l">
               <a:lnSpc>
-                <a:spcPts val="1015"/>
+                <a:spcPts val="696"/>
               </a:lnSpc>
             </a:pPr>
             <a:r>
-              <a:rPr sz="700" b="0">
+              <a:rPr sz="480" b="1" spc="140">
+                <a:solidFill>
+                  <a:srgbClr val="6B7280"/>
+                </a:solidFill>
+                <a:latin typeface="맑은 고딕"/>
+                <a:ea typeface="맑은 고딕"/>
+              </a:rPr>
+              <a:t>MAIL</a:t>
+            </a:r>
+          </a:p>
+        </p:txBody>
+      </p:sp>
+      <p:sp>
+        <p:nvSpPr>
+          <p:cNvPr id="11" name="텍스트"/>
+          <p:cNvSpPr txBox="1"/>
+          <p:nvPr/>
+        </p:nvSpPr>
+        <p:spPr>
+          <a:xfrm>
+            <a:off x="1152000" y="1512000"/>
+            <a:ext cx="1008000" cy="120016"/>
+          </a:xfrm>
+          <a:prstGeom prst="rect">
+            <a:avLst/>
+          </a:prstGeom>
+          <a:noFill/>
+        </p:spPr>
+        <p:txBody>
+          <a:bodyPr wrap="square" lIns="0" rIns="0" tIns="0" bIns="0" anchor="t">
+            <a:spAutoFit/>
+          </a:bodyPr>
+          <a:lstStyle/>
+          <a:p>
+            <a:pPr algn="l">
+              <a:lnSpc>
+                <a:spcPts val="913"/>
+              </a:lnSpc>
+            </a:pPr>
+            <a:r>
+              <a:rPr sz="630" b="0">
                 <a:solidFill>
                   <a:srgbClr val="12151C"/>
                 </a:solidFill>
@@ -3877,16 +3456,37 @@
           </a:p>
         </p:txBody>
       </p:sp>
-      <p:sp>
-        <p:nvSpPr>
-          <p:cNvPr id="27" name="텍스트"/>
+      <p:cxnSp>
+        <p:nvCxnSpPr>
+          <p:cNvPr id="12" name="Connector 11"/>
+          <p:cNvCxnSpPr/>
+          <p:nvPr/>
+        </p:nvCxnSpPr>
+        <p:spPr>
+          <a:xfrm>
+            <a:off x="2080800" y="1411200"/>
+            <a:ext cx="0" cy="201600"/>
+          </a:xfrm>
+          <a:prstGeom prst="line">
+            <a:avLst/>
+          </a:prstGeom>
+          <a:ln w="3600">
+            <a:solidFill>
+              <a:srgbClr val="E3E5E9"/>
+            </a:solidFill>
+          </a:ln>
+        </p:spPr>
+      </p:cxnSp>
+      <p:sp>
+        <p:nvSpPr>
+          <p:cNvPr id="13" name="텍스트"/>
           <p:cNvSpPr txBox="1"/>
           <p:nvPr/>
         </p:nvSpPr>
         <p:spPr>
           <a:xfrm>
-            <a:off x="1620000" y="1612800"/>
-            <a:ext cx="1368000" cy="133351"/>
+            <a:off x="2160000" y="1411200"/>
+            <a:ext cx="972000" cy="91441"/>
           </a:xfrm>
           <a:prstGeom prst="rect">
             <a:avLst/>
@@ -3899,13 +3499,53 @@
           </a:bodyPr>
           <a:lstStyle/>
           <a:p>
-            <a:pPr algn="r">
+            <a:pPr algn="l">
               <a:lnSpc>
-                <a:spcPts val="1015"/>
+                <a:spcPts val="696"/>
               </a:lnSpc>
             </a:pPr>
             <a:r>
-              <a:rPr sz="700" b="0">
+              <a:rPr sz="480" b="1" spc="140">
+                <a:solidFill>
+                  <a:srgbClr val="6B7280"/>
+                </a:solidFill>
+                <a:latin typeface="맑은 고딕"/>
+                <a:ea typeface="맑은 고딕"/>
+              </a:rPr>
+              <a:t>ADDR</a:t>
+            </a:r>
+          </a:p>
+        </p:txBody>
+      </p:sp>
+      <p:sp>
+        <p:nvSpPr>
+          <p:cNvPr id="14" name="텍스트"/>
+          <p:cNvSpPr txBox="1"/>
+          <p:nvPr/>
+        </p:nvSpPr>
+        <p:spPr>
+          <a:xfrm>
+            <a:off x="2160000" y="1512000"/>
+            <a:ext cx="972000" cy="120016"/>
+          </a:xfrm>
+          <a:prstGeom prst="rect">
+            <a:avLst/>
+          </a:prstGeom>
+          <a:noFill/>
+        </p:spPr>
+        <p:txBody>
+          <a:bodyPr wrap="square" lIns="0" rIns="0" tIns="0" bIns="0" anchor="t">
+            <a:spAutoFit/>
+          </a:bodyPr>
+          <a:lstStyle/>
+          <a:p>
+            <a:pPr algn="l">
+              <a:lnSpc>
+                <a:spcPts val="913"/>
+              </a:lnSpc>
+            </a:pPr>
+            <a:r>
+              <a:rPr sz="630" b="0">
                 <a:solidFill>
                   <a:srgbClr val="12151C"/>
                 </a:solidFill>
@@ -3945,43 +3585,14 @@
       <p:grpSpPr/>
       <p:sp>
         <p:nvSpPr>
-          <p:cNvPr id="2" name="Oval 1"/>
-          <p:cNvSpPr/>
-          <p:nvPr/>
-        </p:nvSpPr>
-        <p:spPr>
-          <a:xfrm>
-            <a:off x="1411200" y="295200"/>
-            <a:ext cx="417600" cy="417600"/>
-          </a:xfrm>
-          <a:prstGeom prst="ellipse">
-            <a:avLst/>
-          </a:prstGeom>
-          <a:solidFill>
-            <a:srgbClr val="0057FF"/>
-          </a:solidFill>
-          <a:ln>
-            <a:noFill/>
-          </a:ln>
-        </p:spPr>
-        <p:txBody>
-          <a:bodyPr rtlCol="0" anchor="ctr"/>
-          <a:lstStyle/>
-          <a:p>
-            <a:pPr algn="ctr"/>
-          </a:p>
-        </p:txBody>
-      </p:sp>
-      <p:sp>
-        <p:nvSpPr>
-          <p:cNvPr id="3" name="텍스트"/>
+          <p:cNvPr id="2" name="텍스트"/>
           <p:cNvSpPr txBox="1"/>
           <p:nvPr/>
         </p:nvSpPr>
         <p:spPr>
           <a:xfrm>
-            <a:off x="1368000" y="324000"/>
-            <a:ext cx="504000" cy="360000"/>
+            <a:off x="252000" y="252000"/>
+            <a:ext cx="1080000" cy="99061"/>
           </a:xfrm>
           <a:prstGeom prst="rect">
             <a:avLst/>
@@ -3989,79 +3600,39 @@
           <a:noFill/>
         </p:spPr>
         <p:txBody>
-          <a:bodyPr wrap="square" lIns="0" rIns="0" tIns="0" bIns="0" anchor="ctr">
+          <a:bodyPr wrap="square" lIns="0" rIns="0" tIns="0" bIns="0" anchor="t">
             <a:spAutoFit/>
           </a:bodyPr>
           <a:lstStyle/>
           <a:p>
-            <a:pPr algn="ctr">
+            <a:pPr algn="l">
               <a:lnSpc>
-                <a:spcPts val="3769"/>
+                <a:spcPts val="754"/>
               </a:lnSpc>
             </a:pPr>
             <a:r>
-              <a:rPr sz="2600" b="1">
+              <a:rPr sz="520" b="1" spc="240">
                 <a:solidFill>
-                  <a:srgbClr val="FFFFFF"/>
+                  <a:srgbClr val="6B7280"/>
                 </a:solidFill>
                 <a:latin typeface="맑은 고딕"/>
                 <a:ea typeface="맑은 고딕"/>
               </a:rPr>
-              <a:t>상</a:t>
-            </a:r>
-          </a:p>
-        </p:txBody>
-      </p:sp>
-      <p:sp>
-        <p:nvSpPr>
-          <p:cNvPr id="4" name="텍스트"/>
-          <p:cNvSpPr txBox="1"/>
-          <p:nvPr/>
-        </p:nvSpPr>
-        <p:spPr>
-          <a:xfrm>
-            <a:off x="360000" y="820800"/>
-            <a:ext cx="2520000" cy="161926"/>
-          </a:xfrm>
-          <a:prstGeom prst="rect">
-            <a:avLst/>
-          </a:prstGeom>
-          <a:noFill/>
-        </p:spPr>
-        <p:txBody>
-          <a:bodyPr wrap="square" lIns="0" rIns="0" tIns="0" bIns="0" anchor="t">
-            <a:spAutoFit/>
-          </a:bodyPr>
-          <a:lstStyle/>
-          <a:p>
-            <a:pPr algn="ctr">
-              <a:lnSpc>
-                <a:spcPts val="1232"/>
-              </a:lnSpc>
-            </a:pPr>
-            <a:r>
-              <a:rPr sz="850" b="1" spc="200">
-                <a:solidFill>
-                  <a:srgbClr val="12151C"/>
-                </a:solidFill>
-                <a:latin typeface="맑은 고딕"/>
-                <a:ea typeface="맑은 고딕"/>
-              </a:rPr>
-              <a:t>상호명</a:t>
-            </a:r>
-          </a:p>
-        </p:txBody>
-      </p:sp>
-      <p:sp>
-        <p:nvSpPr>
-          <p:cNvPr id="5" name="Rectangle 4"/>
+              <a:t>취급 품목</a:t>
+            </a:r>
+          </a:p>
+        </p:txBody>
+      </p:sp>
+      <p:sp>
+        <p:nvSpPr>
+          <p:cNvPr id="3" name="Rectangle 2"/>
           <p:cNvSpPr/>
           <p:nvPr/>
         </p:nvSpPr>
         <p:spPr>
           <a:xfrm>
-            <a:off x="1530000" y="1051200"/>
-            <a:ext cx="180000" cy="14400"/>
+            <a:off x="252000" y="367200"/>
+            <a:ext cx="108000" cy="14400"/>
           </a:xfrm>
           <a:prstGeom prst="rect">
             <a:avLst/>
@@ -4083,14 +3654,45 @@
       </p:sp>
       <p:sp>
         <p:nvSpPr>
-          <p:cNvPr id="6" name="텍스트"/>
+          <p:cNvPr id="4" name="Rounded Rectangle 3"/>
+          <p:cNvSpPr/>
+          <p:nvPr/>
+        </p:nvSpPr>
+        <p:spPr>
+          <a:xfrm>
+            <a:off x="252000" y="540000"/>
+            <a:ext cx="412300" cy="194361"/>
+          </a:xfrm>
+          <a:prstGeom prst="roundRect">
+            <a:avLst>
+              <a:gd name="adj" fmla="val 50000"/>
+            </a:avLst>
+          </a:prstGeom>
+          <a:noFill/>
+          <a:ln w="3600">
+            <a:solidFill>
+              <a:srgbClr val="6B7280"/>
+            </a:solidFill>
+          </a:ln>
+        </p:spPr>
+        <p:txBody>
+          <a:bodyPr rtlCol="0" anchor="ctr"/>
+          <a:lstStyle/>
+          <a:p>
+            <a:pPr algn="ctr"/>
+          </a:p>
+        </p:txBody>
+      </p:sp>
+      <p:sp>
+        <p:nvSpPr>
+          <p:cNvPr id="5" name="텍스트"/>
           <p:cNvSpPr txBox="1"/>
           <p:nvPr/>
         </p:nvSpPr>
         <p:spPr>
           <a:xfrm>
-            <a:off x="540000" y="1188000"/>
-            <a:ext cx="2160000" cy="360000"/>
+            <a:off x="252000" y="540000"/>
+            <a:ext cx="412300" cy="194361"/>
           </a:xfrm>
           <a:prstGeom prst="rect">
             <a:avLst/>
@@ -4098,25 +3700,459 @@
           <a:noFill/>
         </p:spPr>
         <p:txBody>
+          <a:bodyPr wrap="square" lIns="0" rIns="0" tIns="0" bIns="0" anchor="ctr">
+            <a:spAutoFit/>
+          </a:bodyPr>
+          <a:lstStyle/>
+          <a:p>
+            <a:pPr algn="ctr">
+              <a:lnSpc>
+                <a:spcPts val="986"/>
+              </a:lnSpc>
+            </a:pPr>
+            <a:r>
+              <a:rPr sz="680" b="0">
+                <a:solidFill>
+                  <a:srgbClr val="12151C"/>
+                </a:solidFill>
+                <a:latin typeface="맑은 고딕"/>
+                <a:ea typeface="맑은 고딕"/>
+              </a:rPr>
+              <a:t>도어락</a:t>
+            </a:r>
+          </a:p>
+        </p:txBody>
+      </p:sp>
+      <p:sp>
+        <p:nvSpPr>
+          <p:cNvPr id="6" name="Rounded Rectangle 5"/>
+          <p:cNvSpPr/>
+          <p:nvPr/>
+        </p:nvSpPr>
+        <p:spPr>
+          <a:xfrm>
+            <a:off x="714700" y="540000"/>
+            <a:ext cx="750833" cy="194361"/>
+          </a:xfrm>
+          <a:prstGeom prst="roundRect">
+            <a:avLst>
+              <a:gd name="adj" fmla="val 50000"/>
+            </a:avLst>
+          </a:prstGeom>
+          <a:noFill/>
+          <a:ln w="3600">
+            <a:solidFill>
+              <a:srgbClr val="6B7280"/>
+            </a:solidFill>
+          </a:ln>
+        </p:spPr>
+        <p:txBody>
+          <a:bodyPr rtlCol="0" anchor="ctr"/>
+          <a:lstStyle/>
+          <a:p>
+            <a:pPr algn="ctr"/>
+          </a:p>
+        </p:txBody>
+      </p:sp>
+      <p:sp>
+        <p:nvSpPr>
+          <p:cNvPr id="7" name="텍스트"/>
+          <p:cNvSpPr txBox="1"/>
+          <p:nvPr/>
+        </p:nvSpPr>
+        <p:spPr>
+          <a:xfrm>
+            <a:off x="714700" y="540000"/>
+            <a:ext cx="750833" cy="194361"/>
+          </a:xfrm>
+          <a:prstGeom prst="rect">
+            <a:avLst/>
+          </a:prstGeom>
+          <a:noFill/>
+        </p:spPr>
+        <p:txBody>
+          <a:bodyPr wrap="square" lIns="0" rIns="0" tIns="0" bIns="0" anchor="ctr">
+            <a:spAutoFit/>
+          </a:bodyPr>
+          <a:lstStyle/>
+          <a:p>
+            <a:pPr algn="ctr">
+              <a:lnSpc>
+                <a:spcPts val="986"/>
+              </a:lnSpc>
+            </a:pPr>
+            <a:r>
+              <a:rPr sz="680" b="0">
+                <a:solidFill>
+                  <a:srgbClr val="12151C"/>
+                </a:solidFill>
+                <a:latin typeface="맑은 고딕"/>
+                <a:ea typeface="맑은 고딕"/>
+              </a:rPr>
+              <a:t>도배 · 장판</a:t>
+            </a:r>
+          </a:p>
+        </p:txBody>
+      </p:sp>
+      <p:sp>
+        <p:nvSpPr>
+          <p:cNvPr id="8" name="Rounded Rectangle 7"/>
+          <p:cNvSpPr/>
+          <p:nvPr/>
+        </p:nvSpPr>
+        <p:spPr>
+          <a:xfrm>
+            <a:off x="1515933" y="540000"/>
+            <a:ext cx="750833" cy="194361"/>
+          </a:xfrm>
+          <a:prstGeom prst="roundRect">
+            <a:avLst>
+              <a:gd name="adj" fmla="val 50000"/>
+            </a:avLst>
+          </a:prstGeom>
+          <a:noFill/>
+          <a:ln w="3600">
+            <a:solidFill>
+              <a:srgbClr val="6B7280"/>
+            </a:solidFill>
+          </a:ln>
+        </p:spPr>
+        <p:txBody>
+          <a:bodyPr rtlCol="0" anchor="ctr"/>
+          <a:lstStyle/>
+          <a:p>
+            <a:pPr algn="ctr"/>
+          </a:p>
+        </p:txBody>
+      </p:sp>
+      <p:sp>
+        <p:nvSpPr>
+          <p:cNvPr id="9" name="텍스트"/>
+          <p:cNvSpPr txBox="1"/>
+          <p:nvPr/>
+        </p:nvSpPr>
+        <p:spPr>
+          <a:xfrm>
+            <a:off x="1515933" y="540000"/>
+            <a:ext cx="750833" cy="194361"/>
+          </a:xfrm>
+          <a:prstGeom prst="rect">
+            <a:avLst/>
+          </a:prstGeom>
+          <a:noFill/>
+        </p:spPr>
+        <p:txBody>
+          <a:bodyPr wrap="square" lIns="0" rIns="0" tIns="0" bIns="0" anchor="ctr">
+            <a:spAutoFit/>
+          </a:bodyPr>
+          <a:lstStyle/>
+          <a:p>
+            <a:pPr algn="ctr">
+              <a:lnSpc>
+                <a:spcPts val="986"/>
+              </a:lnSpc>
+            </a:pPr>
+            <a:r>
+              <a:rPr sz="680" b="0">
+                <a:solidFill>
+                  <a:srgbClr val="12151C"/>
+                </a:solidFill>
+                <a:latin typeface="맑은 고딕"/>
+                <a:ea typeface="맑은 고딕"/>
+              </a:rPr>
+              <a:t>반려동물 미용</a:t>
+            </a:r>
+          </a:p>
+        </p:txBody>
+      </p:sp>
+      <p:sp>
+        <p:nvSpPr>
+          <p:cNvPr id="10" name="Rounded Rectangle 9"/>
+          <p:cNvSpPr/>
+          <p:nvPr/>
+        </p:nvSpPr>
+        <p:spPr>
+          <a:xfrm>
+            <a:off x="2317167" y="540000"/>
+            <a:ext cx="581567" cy="194361"/>
+          </a:xfrm>
+          <a:prstGeom prst="roundRect">
+            <a:avLst>
+              <a:gd name="adj" fmla="val 50000"/>
+            </a:avLst>
+          </a:prstGeom>
+          <a:noFill/>
+          <a:ln w="3600">
+            <a:solidFill>
+              <a:srgbClr val="6B7280"/>
+            </a:solidFill>
+          </a:ln>
+        </p:spPr>
+        <p:txBody>
+          <a:bodyPr rtlCol="0" anchor="ctr"/>
+          <a:lstStyle/>
+          <a:p>
+            <a:pPr algn="ctr"/>
+          </a:p>
+        </p:txBody>
+      </p:sp>
+      <p:sp>
+        <p:nvSpPr>
+          <p:cNvPr id="11" name="텍스트"/>
+          <p:cNvSpPr txBox="1"/>
+          <p:nvPr/>
+        </p:nvSpPr>
+        <p:spPr>
+          <a:xfrm>
+            <a:off x="2317167" y="540000"/>
+            <a:ext cx="581567" cy="194361"/>
+          </a:xfrm>
+          <a:prstGeom prst="rect">
+            <a:avLst/>
+          </a:prstGeom>
+          <a:noFill/>
+        </p:spPr>
+        <p:txBody>
+          <a:bodyPr wrap="square" lIns="0" rIns="0" tIns="0" bIns="0" anchor="ctr">
+            <a:spAutoFit/>
+          </a:bodyPr>
+          <a:lstStyle/>
+          <a:p>
+            <a:pPr algn="ctr">
+              <a:lnSpc>
+                <a:spcPts val="986"/>
+              </a:lnSpc>
+            </a:pPr>
+            <a:r>
+              <a:rPr sz="680" b="0">
+                <a:solidFill>
+                  <a:srgbClr val="12151C"/>
+                </a:solidFill>
+                <a:latin typeface="맑은 고딕"/>
+                <a:ea typeface="맑은 고딕"/>
+              </a:rPr>
+              <a:t>가구 제작</a:t>
+            </a:r>
+          </a:p>
+        </p:txBody>
+      </p:sp>
+      <p:cxnSp>
+        <p:nvCxnSpPr>
+          <p:cNvPr id="12" name="Connector 11"/>
+          <p:cNvCxnSpPr/>
+          <p:nvPr/>
+        </p:nvCxnSpPr>
+        <p:spPr>
+          <a:xfrm>
+            <a:off x="252000" y="1339200"/>
+            <a:ext cx="2736000" cy="0"/>
+          </a:xfrm>
+          <a:prstGeom prst="line">
+            <a:avLst/>
+          </a:prstGeom>
+          <a:ln w="3600">
+            <a:solidFill>
+              <a:srgbClr val="E3E5E9"/>
+            </a:solidFill>
+          </a:ln>
+        </p:spPr>
+      </p:cxnSp>
+      <p:sp>
+        <p:nvSpPr>
+          <p:cNvPr id="13" name="텍스트"/>
+          <p:cNvSpPr txBox="1"/>
+          <p:nvPr/>
+        </p:nvSpPr>
+        <p:spPr>
+          <a:xfrm>
+            <a:off x="252000" y="1422000"/>
+            <a:ext cx="396000" cy="91441"/>
+          </a:xfrm>
+          <a:prstGeom prst="rect">
+            <a:avLst/>
+          </a:prstGeom>
+          <a:noFill/>
+        </p:spPr>
+        <p:txBody>
           <a:bodyPr wrap="square" lIns="0" rIns="0" tIns="0" bIns="0" anchor="t">
             <a:spAutoFit/>
           </a:bodyPr>
           <a:lstStyle/>
           <a:p>
-            <a:pPr algn="ctr">
+            <a:pPr algn="l">
               <a:lnSpc>
-                <a:spcPts val="1305"/>
+                <a:spcPts val="696"/>
               </a:lnSpc>
             </a:pPr>
             <a:r>
-              <a:rPr sz="900" b="1">
+              <a:rPr sz="480" b="1" spc="140">
                 <a:solidFill>
                   <a:srgbClr val="6B7280"/>
                 </a:solidFill>
                 <a:latin typeface="맑은 고딕"/>
                 <a:ea typeface="맑은 고딕"/>
               </a:rPr>
-              <a:t>계절을 앞서 준비해 두었습니다</a:t>
+              <a:t>HOURS</a:t>
+            </a:r>
+          </a:p>
+        </p:txBody>
+      </p:sp>
+      <p:sp>
+        <p:nvSpPr>
+          <p:cNvPr id="14" name="텍스트"/>
+          <p:cNvSpPr txBox="1"/>
+          <p:nvPr/>
+        </p:nvSpPr>
+        <p:spPr>
+          <a:xfrm>
+            <a:off x="648000" y="1411200"/>
+            <a:ext cx="2340000" cy="121921"/>
+          </a:xfrm>
+          <a:prstGeom prst="rect">
+            <a:avLst/>
+          </a:prstGeom>
+          <a:noFill/>
+        </p:spPr>
+        <p:txBody>
+          <a:bodyPr wrap="square" lIns="0" rIns="0" tIns="0" bIns="0" anchor="t">
+            <a:spAutoFit/>
+          </a:bodyPr>
+          <a:lstStyle/>
+          <a:p>
+            <a:pPr algn="l">
+              <a:lnSpc>
+                <a:spcPts val="927"/>
+              </a:lnSpc>
+            </a:pPr>
+            <a:r>
+              <a:rPr sz="640" b="0">
+                <a:solidFill>
+                  <a:srgbClr val="12151C"/>
+                </a:solidFill>
+                <a:latin typeface="맑은 고딕"/>
+                <a:ea typeface="맑은 고딕"/>
+              </a:rPr>
+              <a:t>매일 10:00 – 20:00</a:t>
+            </a:r>
+          </a:p>
+        </p:txBody>
+      </p:sp>
+      <p:sp>
+        <p:nvSpPr>
+          <p:cNvPr id="15" name="텍스트"/>
+          <p:cNvSpPr txBox="1"/>
+          <p:nvPr/>
+        </p:nvSpPr>
+        <p:spPr>
+          <a:xfrm>
+            <a:off x="252000" y="1580400"/>
+            <a:ext cx="396000" cy="91441"/>
+          </a:xfrm>
+          <a:prstGeom prst="rect">
+            <a:avLst/>
+          </a:prstGeom>
+          <a:noFill/>
+        </p:spPr>
+        <p:txBody>
+          <a:bodyPr wrap="square" lIns="0" rIns="0" tIns="0" bIns="0" anchor="t">
+            <a:spAutoFit/>
+          </a:bodyPr>
+          <a:lstStyle/>
+          <a:p>
+            <a:pPr algn="l">
+              <a:lnSpc>
+                <a:spcPts val="696"/>
+              </a:lnSpc>
+            </a:pPr>
+            <a:r>
+              <a:rPr sz="480" b="1" spc="140">
+                <a:solidFill>
+                  <a:srgbClr val="6B7280"/>
+                </a:solidFill>
+                <a:latin typeface="맑은 고딕"/>
+                <a:ea typeface="맑은 고딕"/>
+              </a:rPr>
+              <a:t>BLOG</a:t>
+            </a:r>
+          </a:p>
+        </p:txBody>
+      </p:sp>
+      <p:sp>
+        <p:nvSpPr>
+          <p:cNvPr id="16" name="텍스트"/>
+          <p:cNvSpPr txBox="1"/>
+          <p:nvPr/>
+        </p:nvSpPr>
+        <p:spPr>
+          <a:xfrm>
+            <a:off x="648000" y="1569600"/>
+            <a:ext cx="2340000" cy="121921"/>
+          </a:xfrm>
+          <a:prstGeom prst="rect">
+            <a:avLst/>
+          </a:prstGeom>
+          <a:noFill/>
+        </p:spPr>
+        <p:txBody>
+          <a:bodyPr wrap="square" lIns="0" rIns="0" tIns="0" bIns="0" anchor="t">
+            <a:spAutoFit/>
+          </a:bodyPr>
+          <a:lstStyle/>
+          <a:p>
+            <a:pPr algn="l">
+              <a:lnSpc>
+                <a:spcPts val="927"/>
+              </a:lnSpc>
+            </a:pPr>
+            <a:r>
+              <a:rPr sz="640" b="0">
+                <a:solidFill>
+                  <a:srgbClr val="12151C"/>
+                </a:solidFill>
+                <a:latin typeface="맑은 고딕"/>
+                <a:ea typeface="맑은 고딕"/>
+              </a:rPr>
+              <a:t>blog.example.com</a:t>
+            </a:r>
+          </a:p>
+        </p:txBody>
+      </p:sp>
+      <p:sp>
+        <p:nvSpPr>
+          <p:cNvPr id="17" name="텍스트"/>
+          <p:cNvSpPr txBox="1"/>
+          <p:nvPr/>
+        </p:nvSpPr>
+        <p:spPr>
+          <a:xfrm>
+            <a:off x="1548000" y="1411200"/>
+            <a:ext cx="1440000" cy="123826"/>
+          </a:xfrm>
+          <a:prstGeom prst="rect">
+            <a:avLst/>
+          </a:prstGeom>
+          <a:noFill/>
+        </p:spPr>
+        <p:txBody>
+          <a:bodyPr wrap="square" lIns="0" rIns="0" tIns="0" bIns="0" anchor="t">
+            <a:spAutoFit/>
+          </a:bodyPr>
+          <a:lstStyle/>
+          <a:p>
+            <a:pPr algn="r">
+              <a:lnSpc>
+                <a:spcPts val="942"/>
+              </a:lnSpc>
+            </a:pPr>
+            <a:r>
+              <a:rPr sz="650" b="1" spc="220">
+                <a:solidFill>
+                  <a:srgbClr val="6B7280"/>
+                </a:solidFill>
+                <a:latin typeface="맑은 고딕"/>
+                <a:ea typeface="맑은 고딕"/>
+              </a:rPr>
+              <a:t>상호명</a:t>
             </a:r>
           </a:p>
         </p:txBody>
